--- a/docs/SIH2026_26232_AnnaChain_OfficialFormat.pptx
+++ b/docs/SIH2026_26232_AnnaChain_OfficialFormat.pptx
@@ -9125,7 +9125,7 @@
                 <a:ea typeface="Calibri" pitchFamily="34" charset="-122"/>
                 <a:cs typeface="Calibri" pitchFamily="34" charset="-120"/>
               </a:rPr>
-              <a:t>AI</a:t>
+              <a:t>Analytics Engine</a:t>
             </a:r>
             <a:endParaRPr lang="en-US" sz="850" dirty="0"/>
           </a:p>
@@ -9164,7 +9164,7 @@
                 <a:ea typeface="Calibri" pitchFamily="34" charset="-122"/>
                 <a:cs typeface="Calibri" pitchFamily="34" charset="-120"/>
               </a:rPr>
-              <a:t>spoilage · shelf life</a:t>
+              <a:t>Q10 kinetics · rule-based classification</a:t>
             </a:r>
             <a:endParaRPr lang="en-US" sz="700" dirty="0"/>
           </a:p>
